--- a/docs/forms/ppt_form_ele01.pptx
+++ b/docs/forms/ppt_form_ele01.pptx
@@ -211,7 +211,7 @@
           </a:lstStyle>
           <a:p>
             <a:fld id="{E5D955E0-C526-3D49-9F11-D927B1BE19F4}" type="datetimeFigureOut">
-              <a:t>2026/8/27</a:t>
+              <a:t>2026/9/8</a:t>
             </a:fld>
             <a:endParaRPr kumimoji="1" lang="ja-JP" altLang="en-US"/>
           </a:p>
@@ -764,7 +764,7 @@
           </a:lstStyle>
           <a:p>
             <a:fld id="{7A06F964-C6DC-6A49-ADCF-10106028A934}" type="datetime1">
-              <a:t>2026/8/27</a:t>
+              <a:t>2026/9/8</a:t>
             </a:fld>
             <a:endParaRPr lang="en-US"/>
           </a:p>
@@ -1192,7 +1192,7 @@
           </a:lstStyle>
           <a:p>
             <a:fld id="{B2A3E925-170B-674F-8ADF-5099AA65936C}" type="datetime1">
-              <a:t>2026/8/27</a:t>
+              <a:t>2026/9/8</a:t>
             </a:fld>
             <a:endParaRPr lang="en-US"/>
           </a:p>
@@ -1830,7 +1830,7 @@
           </a:lstStyle>
           <a:p>
             <a:fld id="{B2A3E925-170B-674F-8ADF-5099AA65936C}" type="datetime1">
-              <a:t>2026/8/27</a:t>
+              <a:t>2026/9/8</a:t>
             </a:fld>
             <a:endParaRPr lang="en-US"/>
           </a:p>
@@ -2347,7 +2347,7 @@
           </a:lstStyle>
           <a:p>
             <a:fld id="{B2A3E925-170B-674F-8ADF-5099AA65936C}" type="datetime1">
-              <a:t>2026/8/27</a:t>
+              <a:t>2026/9/8</a:t>
             </a:fld>
             <a:endParaRPr lang="en-US"/>
           </a:p>
@@ -2894,7 +2894,7 @@
           </a:lstStyle>
           <a:p>
             <a:fld id="{B2A3E925-170B-674F-8ADF-5099AA65936C}" type="datetime1">
-              <a:t>2026/8/27</a:t>
+              <a:t>2026/9/8</a:t>
             </a:fld>
             <a:endParaRPr lang="en-US"/>
           </a:p>
@@ -3633,7 +3633,7 @@
           </a:lstStyle>
           <a:p>
             <a:fld id="{B2A3E925-170B-674F-8ADF-5099AA65936C}" type="datetime1">
-              <a:t>2026/8/27</a:t>
+              <a:t>2026/9/8</a:t>
             </a:fld>
             <a:endParaRPr lang="en-US"/>
           </a:p>
@@ -3930,7 +3930,7 @@
           </a:lstStyle>
           <a:p>
             <a:fld id="{B2A3E925-170B-674F-8ADF-5099AA65936C}" type="datetime1">
-              <a:t>2026/8/27</a:t>
+              <a:t>2026/9/8</a:t>
             </a:fld>
             <a:endParaRPr lang="en-US"/>
           </a:p>
@@ -4270,7 +4270,7 @@
           </a:lstStyle>
           <a:p>
             <a:fld id="{B2A3E925-170B-674F-8ADF-5099AA65936C}" type="datetime1">
-              <a:t>2026/8/27</a:t>
+              <a:t>2026/9/8</a:t>
             </a:fld>
             <a:endParaRPr lang="en-US"/>
           </a:p>
@@ -4567,7 +4567,7 @@
           </a:lstStyle>
           <a:p>
             <a:fld id="{B2A3E925-170B-674F-8ADF-5099AA65936C}" type="datetime1">
-              <a:t>2026/8/27</a:t>
+              <a:t>2026/9/8</a:t>
             </a:fld>
             <a:endParaRPr lang="en-US"/>
           </a:p>
